--- a/files/yellavelalandu kasta kalamandu vallabhunda yesuni stuthinchudi.pptx
+++ b/files/yellavelalandu kasta kalamandu vallabhunda yesuni stuthinchudi.pptx
@@ -269,7 +269,7 @@
           <a:p>
             <a:fld id="{958664FA-0EDE-4AFC-901B-F2F5E6472D2B}" type="datetimeFigureOut">
               <a:rPr lang="en-IN" smtClean="0"/>
-              <a:t>06-03-2026</a:t>
+              <a:t>25-04-2026</a:t>
             </a:fld>
             <a:endParaRPr lang="en-IN"/>
           </a:p>
@@ -469,7 +469,7 @@
           <a:p>
             <a:fld id="{958664FA-0EDE-4AFC-901B-F2F5E6472D2B}" type="datetimeFigureOut">
               <a:rPr lang="en-IN" smtClean="0"/>
-              <a:t>06-03-2026</a:t>
+              <a:t>25-04-2026</a:t>
             </a:fld>
             <a:endParaRPr lang="en-IN"/>
           </a:p>
@@ -679,7 +679,7 @@
           <a:p>
             <a:fld id="{958664FA-0EDE-4AFC-901B-F2F5E6472D2B}" type="datetimeFigureOut">
               <a:rPr lang="en-IN" smtClean="0"/>
-              <a:t>06-03-2026</a:t>
+              <a:t>25-04-2026</a:t>
             </a:fld>
             <a:endParaRPr lang="en-IN"/>
           </a:p>
@@ -879,7 +879,7 @@
           <a:p>
             <a:fld id="{958664FA-0EDE-4AFC-901B-F2F5E6472D2B}" type="datetimeFigureOut">
               <a:rPr lang="en-IN" smtClean="0"/>
-              <a:t>06-03-2026</a:t>
+              <a:t>25-04-2026</a:t>
             </a:fld>
             <a:endParaRPr lang="en-IN"/>
           </a:p>
@@ -1155,7 +1155,7 @@
           <a:p>
             <a:fld id="{958664FA-0EDE-4AFC-901B-F2F5E6472D2B}" type="datetimeFigureOut">
               <a:rPr lang="en-IN" smtClean="0"/>
-              <a:t>06-03-2026</a:t>
+              <a:t>25-04-2026</a:t>
             </a:fld>
             <a:endParaRPr lang="en-IN"/>
           </a:p>
@@ -1423,7 +1423,7 @@
           <a:p>
             <a:fld id="{958664FA-0EDE-4AFC-901B-F2F5E6472D2B}" type="datetimeFigureOut">
               <a:rPr lang="en-IN" smtClean="0"/>
-              <a:t>06-03-2026</a:t>
+              <a:t>25-04-2026</a:t>
             </a:fld>
             <a:endParaRPr lang="en-IN"/>
           </a:p>
@@ -1838,7 +1838,7 @@
           <a:p>
             <a:fld id="{958664FA-0EDE-4AFC-901B-F2F5E6472D2B}" type="datetimeFigureOut">
               <a:rPr lang="en-IN" smtClean="0"/>
-              <a:t>06-03-2026</a:t>
+              <a:t>25-04-2026</a:t>
             </a:fld>
             <a:endParaRPr lang="en-IN"/>
           </a:p>
@@ -1980,7 +1980,7 @@
           <a:p>
             <a:fld id="{958664FA-0EDE-4AFC-901B-F2F5E6472D2B}" type="datetimeFigureOut">
               <a:rPr lang="en-IN" smtClean="0"/>
-              <a:t>06-03-2026</a:t>
+              <a:t>25-04-2026</a:t>
             </a:fld>
             <a:endParaRPr lang="en-IN"/>
           </a:p>
@@ -2093,7 +2093,7 @@
           <a:p>
             <a:fld id="{958664FA-0EDE-4AFC-901B-F2F5E6472D2B}" type="datetimeFigureOut">
               <a:rPr lang="en-IN" smtClean="0"/>
-              <a:t>06-03-2026</a:t>
+              <a:t>25-04-2026</a:t>
             </a:fld>
             <a:endParaRPr lang="en-IN"/>
           </a:p>
@@ -2406,7 +2406,7 @@
           <a:p>
             <a:fld id="{958664FA-0EDE-4AFC-901B-F2F5E6472D2B}" type="datetimeFigureOut">
               <a:rPr lang="en-IN" smtClean="0"/>
-              <a:t>06-03-2026</a:t>
+              <a:t>25-04-2026</a:t>
             </a:fld>
             <a:endParaRPr lang="en-IN"/>
           </a:p>
@@ -2695,7 +2695,7 @@
           <a:p>
             <a:fld id="{958664FA-0EDE-4AFC-901B-F2F5E6472D2B}" type="datetimeFigureOut">
               <a:rPr lang="en-IN" smtClean="0"/>
-              <a:t>06-03-2026</a:t>
+              <a:t>25-04-2026</a:t>
             </a:fld>
             <a:endParaRPr lang="en-IN"/>
           </a:p>
@@ -2938,7 +2938,7 @@
           <a:p>
             <a:fld id="{958664FA-0EDE-4AFC-901B-F2F5E6472D2B}" type="datetimeFigureOut">
               <a:rPr lang="en-IN" smtClean="0"/>
-              <a:t>06-03-2026</a:t>
+              <a:t>25-04-2026</a:t>
             </a:fld>
             <a:endParaRPr lang="en-IN"/>
           </a:p>
@@ -3777,13 +3777,34 @@
         <p:spPr>
           <a:xfrm>
             <a:off x="702469" y="365125"/>
-            <a:ext cx="11168062" cy="5099844"/>
+            <a:ext cx="11168062" cy="3785652"/>
           </a:xfrm>
           <a:prstGeom prst="rect">
             <a:avLst/>
           </a:prstGeom>
-          <a:noFill/>
+          <a:solidFill>
+            <a:schemeClr val="dk1">
+              <a:alpha val="27000"/>
+            </a:schemeClr>
+          </a:solidFill>
+          <a:ln>
+            <a:noFill/>
+          </a:ln>
         </p:spPr>
+        <p:style>
+          <a:lnRef idx="0">
+            <a:scrgbClr r="0" g="0" b="0"/>
+          </a:lnRef>
+          <a:fillRef idx="0">
+            <a:scrgbClr r="0" g="0" b="0"/>
+          </a:fillRef>
+          <a:effectRef idx="0">
+            <a:scrgbClr r="0" g="0" b="0"/>
+          </a:effectRef>
+          <a:fontRef idx="minor">
+            <a:schemeClr val="lt1"/>
+          </a:fontRef>
+        </p:style>
         <p:txBody>
           <a:bodyPr wrap="square">
             <a:spAutoFit/>
@@ -3801,16 +3822,6 @@
               </a:rPr>
               <a:t>విమోచకుడా – విమోచన నీవే</a:t>
             </a:r>
-            <a:endParaRPr lang="en-GB" sz="8000" b="1" i="0" dirty="0">
-              <a:solidFill>
-                <a:schemeClr val="bg1"/>
-              </a:solidFill>
-              <a:effectLst/>
-              <a:latin typeface="Lato" panose="020F0502020204030203" pitchFamily="34" charset="0"/>
-            </a:endParaRPr>
-          </a:p>
-          <a:p>
-            <a:pPr algn="ctr"/>
             <a:br>
               <a:rPr lang="te-IN" sz="8000" b="1" dirty="0">
                 <a:solidFill>
